--- a/05-practice-git-advanced/slides/05-git-advanced.pptx
+++ b/05-practice-git-advanced/slides/05-git-advanced.pptx
@@ -1212,37 +1212,18 @@
               <a:t>Git</a:t>
             </a:r>
             <a:r>
-              <a:rPr lang="ja-JP" altLang="en-US" sz="4000" dirty="0">
+              <a:rPr lang="ja-JP" altLang="en-US" sz="4000">
                 <a:solidFill>
                   <a:srgbClr val="011893"/>
                 </a:solidFill>
               </a:rPr>
-              <a:t>の操作</a:t>
-            </a:r>
-            <a:r>
-              <a:rPr lang="en-US" altLang="ja-JP" sz="4000" dirty="0">
-                <a:solidFill>
-                  <a:srgbClr val="011893"/>
-                </a:solidFill>
-              </a:rPr>
-              <a:t>(</a:t>
-            </a:r>
-            <a:r>
-              <a:rPr lang="ja-JP" altLang="en-US" sz="4000" dirty="0">
-                <a:solidFill>
-                  <a:srgbClr val="011893"/>
-                </a:solidFill>
-              </a:rPr>
-              <a:t>応用編</a:t>
-            </a:r>
-            <a:r>
-              <a:rPr lang="en-US" altLang="ja-JP" sz="4000" dirty="0">
-                <a:solidFill>
-                  <a:srgbClr val="011893"/>
-                </a:solidFill>
-              </a:rPr>
-              <a:t>)</a:t>
-            </a:r>
+              <a:t>の応用操作</a:t>
+            </a:r>
+            <a:endParaRPr lang="en-US" altLang="ja-JP" sz="4000" dirty="0">
+              <a:solidFill>
+                <a:srgbClr val="011893"/>
+              </a:solidFill>
+            </a:endParaRPr>
           </a:p>
         </p:txBody>
       </p:sp>

--- a/05-practice-git-advanced/slides/05-git-advanced.pptx
+++ b/05-practice-git-advanced/slides/05-git-advanced.pptx
@@ -242,7 +242,7 @@
           </a:lstStyle>
           <a:p>
             <a:fld id="{6B8D1B20-A248-FB47-8240-73C0C5F47C9D}" type="datetimeFigureOut">
-              <a:t>2026/3/4</a:t>
+              <a:t>2026/3/9</a:t>
             </a:fld>
             <a:endParaRPr kumimoji="1" lang="ja-JP" altLang="en-US"/>
           </a:p>
